--- a/Schools_ML_Track/camp_2026/slides/DA/DA19.pptx
+++ b/Schools_ML_Track/camp_2026/slides/DA/DA19.pptx
@@ -128,7 +128,7 @@
   <p:extLst>
     <p:ext uri="{521415D9-36F7-43E2-AB2F-B90AF26B5E84}">
       <p14:sectionLst xmlns:p14="http://schemas.microsoft.com/office/powerpoint/2010/main">
-        <p14:section name="Opening" id="{fcfee2a2-d21d-fa6f-5192-5f8b9eefad5e}">
+        <p14:section name="Opening" id="{c9d639c2-61ad-b043-1903-68f847fe11c2}">
           <p14:sldIdLst>
             <p14:sldId id="256"/>
             <p14:sldId id="257"/>
@@ -139,7 +139,7 @@
             <p14:sldId id="262"/>
           </p14:sldIdLst>
         </p14:section>
-        <p14:section name="Block A" id="{57f70292-16a6-9503-36eb-82b50fe5437f}">
+        <p14:section name="Block A" id="{395b95c3-733f-b816-da1b-dbb1080b43de}">
           <p14:sldIdLst>
             <p14:sldId id="263"/>
             <p14:sldId id="264"/>
@@ -149,15 +149,15 @@
             <p14:sldId id="269"/>
           </p14:sldIdLst>
         </p14:section>
-        <p14:section name="Break" id="{465f59a6-ae77-cda9-e149-85f639a22b98}">
+        <p14:section name="Break" id="{1a7f0eff-8b2b-0e41-51b0-d50d365aceb5}">
           <p14:sldIdLst>
             <p14:sldId id="267"/>
           </p14:sldIdLst>
         </p14:section>
-        <p14:section name="Block A" id="{3a1343d4-9aa6-ca0e-9d2e-1632435d4c2d}">
+        <p14:section name="Block A" id="{d1576b53-f601-aa91-de3d-5ac218ad3204}">
           <p14:sldIdLst/>
         </p14:section>
-        <p14:section name="Block B" id="{c279ab22-fc2c-127a-56d3-1c511e013fad}">
+        <p14:section name="Block B" id="{fd42a256-63f2-7296-60df-0d222688f293}">
           <p14:sldIdLst>
             <p14:sldId id="270"/>
             <p14:sldId id="271"/>
@@ -166,7 +166,7 @@
             <p14:sldId id="274"/>
           </p14:sldIdLst>
         </p14:section>
-        <p14:section name="Make and close" id="{18acc644-5aa4-90d6-9ea7-169f69a74066}">
+        <p14:section name="Make and close" id="{403afedc-7b4d-486f-a8a4-e4ada0e9a44e}">
           <p14:sldIdLst>
             <p14:sldId id="275"/>
             <p14:sldId id="276"/>

--- a/Schools_ML_Track/camp_2026/slides/DA/DA19.pptx
+++ b/Schools_ML_Track/camp_2026/slides/DA/DA19.pptx
@@ -128,7 +128,7 @@
   <p:extLst>
     <p:ext uri="{521415D9-36F7-43E2-AB2F-B90AF26B5E84}">
       <p14:sectionLst xmlns:p14="http://schemas.microsoft.com/office/powerpoint/2010/main">
-        <p14:section name="Opening" id="{c9d639c2-61ad-b043-1903-68f847fe11c2}">
+        <p14:section name="Opening" id="{7a85e27f-be91-e351-fb95-cfdec1e81ef3}">
           <p14:sldIdLst>
             <p14:sldId id="256"/>
             <p14:sldId id="257"/>
@@ -139,7 +139,7 @@
             <p14:sldId id="262"/>
           </p14:sldIdLst>
         </p14:section>
-        <p14:section name="Block A" id="{395b95c3-733f-b816-da1b-dbb1080b43de}">
+        <p14:section name="Block A" id="{b19d2b35-6f2d-97d3-9261-e24454aab8f4}">
           <p14:sldIdLst>
             <p14:sldId id="263"/>
             <p14:sldId id="264"/>
@@ -149,15 +149,15 @@
             <p14:sldId id="269"/>
           </p14:sldIdLst>
         </p14:section>
-        <p14:section name="Break" id="{1a7f0eff-8b2b-0e41-51b0-d50d365aceb5}">
+        <p14:section name="Break" id="{f795fd1c-ca07-47a5-1239-837a35dea46e}">
           <p14:sldIdLst>
             <p14:sldId id="267"/>
           </p14:sldIdLst>
         </p14:section>
-        <p14:section name="Block A" id="{d1576b53-f601-aa91-de3d-5ac218ad3204}">
+        <p14:section name="Block A" id="{b05985bd-a1e5-741b-ea8b-1663bfeeef38}">
           <p14:sldIdLst/>
         </p14:section>
-        <p14:section name="Block B" id="{fd42a256-63f2-7296-60df-0d222688f293}">
+        <p14:section name="Block B" id="{ca69d58c-3fdf-6f8b-4a7e-54a0f7ee43ec}">
           <p14:sldIdLst>
             <p14:sldId id="270"/>
             <p14:sldId id="271"/>
@@ -166,7 +166,7 @@
             <p14:sldId id="274"/>
           </p14:sldIdLst>
         </p14:section>
-        <p14:section name="Make and close" id="{403afedc-7b4d-486f-a8a4-e4ada0e9a44e}">
+        <p14:section name="Make and close" id="{c90e1cab-f3cb-ddc7-92f3-b9caa8e80b14}">
           <p14:sldIdLst>
             <p14:sldId id="275"/>
             <p14:sldId id="276"/>
@@ -3197,7 +3197,24 @@
                 <a:ea typeface="Lato" pitchFamily="34" charset="-122"/>
                 <a:cs typeface="Lato" pitchFamily="34" charset="-120"/>
               </a:rPr>
-              <a:t>Project question and a safe plan</a:t>
+              <a:t>Project question</a:t>
+            </a:r>
+            <a:endParaRPr lang="en-US" sz="5600" dirty="0"/>
+          </a:p>
+          <a:p>
+            <a:pPr algn="l" indent="0" marL="0">
+              <a:buNone/>
+            </a:pPr>
+            <a:r>
+              <a:rPr lang="en-US" sz="5600" b="1" dirty="0">
+                <a:solidFill>
+                  <a:srgbClr val="FFFFFF"/>
+                </a:solidFill>
+                <a:latin typeface="Lato" pitchFamily="34" charset="0"/>
+                <a:ea typeface="Lato" pitchFamily="34" charset="-122"/>
+                <a:cs typeface="Lato" pitchFamily="34" charset="-120"/>
+              </a:rPr>
+              <a:t>and a safe plan</a:t>
             </a:r>
             <a:endParaRPr lang="en-US" sz="5600" dirty="0"/>
           </a:p>
@@ -5648,15 +5665,15 @@
           <a:p>
             <a:pPr algn="l" indent="0" marL="0">
               <a:lnSpc>
-                <a:spcPts val="3240"/>
+                <a:spcPts val="2640"/>
               </a:lnSpc>
               <a:spcAft>
-                <a:spcPts val="2520"/>
+                <a:spcPts val="2020"/>
               </a:spcAft>
               <a:buNone/>
             </a:pPr>
             <a:r>
-              <a:rPr lang="en-US" sz="2700" dirty="0">
+              <a:rPr lang="en-US" sz="2200" dirty="0">
                 <a:solidFill>
                   <a:srgbClr val="111111"/>
                 </a:solidFill>
@@ -5664,22 +5681,22 @@
                 <a:ea typeface="Lato" pitchFamily="34" charset="-122"/>
                 <a:cs typeface="Lato" pitchFamily="34" charset="-120"/>
               </a:rPr>
-              <a:t>Write PROJECT_PLAN.md with the seven headings. Name the data file and its licence or its invented status. List the three questions, the columns each needs, the charts and the limitations. Ask the instructor to approve a narrow scope before you build.</a:t>
-            </a:r>
-            <a:endParaRPr lang="en-US" sz="2700" dirty="0"/>
+              <a:t>Write PROJECT_PLAN.md with the seven headings.</a:t>
+            </a:r>
+            <a:endParaRPr lang="en-US" sz="2200" dirty="0"/>
           </a:p>
           <a:p>
             <a:pPr algn="l" indent="0" marL="0">
               <a:lnSpc>
-                <a:spcPts val="3240"/>
+                <a:spcPts val="2640"/>
               </a:lnSpc>
               <a:spcAft>
-                <a:spcPts val="2520"/>
+                <a:spcPts val="2020"/>
               </a:spcAft>
               <a:buNone/>
             </a:pPr>
             <a:r>
-              <a:rPr lang="en-US" sz="2700" dirty="0">
+              <a:rPr lang="en-US" sz="2200" dirty="0">
                 <a:solidFill>
                   <a:srgbClr val="111111"/>
                 </a:solidFill>
@@ -5687,9 +5704,78 @@
                 <a:ea typeface="Lato" pitchFamily="34" charset="-122"/>
                 <a:cs typeface="Lato" pitchFamily="34" charset="-120"/>
               </a:rPr>
+              <a:t>Name the data file and its licence or its invented status.</a:t>
+            </a:r>
+            <a:endParaRPr lang="en-US" sz="2200" dirty="0"/>
+          </a:p>
+          <a:p>
+            <a:pPr algn="l" indent="0" marL="0">
+              <a:lnSpc>
+                <a:spcPts val="2640"/>
+              </a:lnSpc>
+              <a:spcAft>
+                <a:spcPts val="2020"/>
+              </a:spcAft>
+              <a:buNone/>
+            </a:pPr>
+            <a:r>
+              <a:rPr lang="en-US" sz="2200" dirty="0">
+                <a:solidFill>
+                  <a:srgbClr val="111111"/>
+                </a:solidFill>
+                <a:latin typeface="Lato" pitchFamily="34" charset="0"/>
+                <a:ea typeface="Lato" pitchFamily="34" charset="-122"/>
+                <a:cs typeface="Lato" pitchFamily="34" charset="-120"/>
+              </a:rPr>
+              <a:t>List the three questions, the columns each needs, the charts and the limitations.</a:t>
+            </a:r>
+            <a:endParaRPr lang="en-US" sz="2200" dirty="0"/>
+          </a:p>
+          <a:p>
+            <a:pPr algn="l" indent="0" marL="0">
+              <a:lnSpc>
+                <a:spcPts val="2640"/>
+              </a:lnSpc>
+              <a:spcAft>
+                <a:spcPts val="2020"/>
+              </a:spcAft>
+              <a:buNone/>
+            </a:pPr>
+            <a:r>
+              <a:rPr lang="en-US" sz="2200" dirty="0">
+                <a:solidFill>
+                  <a:srgbClr val="111111"/>
+                </a:solidFill>
+                <a:latin typeface="Lato" pitchFamily="34" charset="0"/>
+                <a:ea typeface="Lato" pitchFamily="34" charset="-122"/>
+                <a:cs typeface="Lato" pitchFamily="34" charset="-120"/>
+              </a:rPr>
+              <a:t>Ask the instructor to approve a narrow scope before you build.</a:t>
+            </a:r>
+            <a:endParaRPr lang="en-US" sz="2200" dirty="0"/>
+          </a:p>
+          <a:p>
+            <a:pPr algn="l" indent="0" marL="0">
+              <a:lnSpc>
+                <a:spcPts val="2640"/>
+              </a:lnSpc>
+              <a:spcAft>
+                <a:spcPts val="2020"/>
+              </a:spcAft>
+              <a:buNone/>
+            </a:pPr>
+            <a:r>
+              <a:rPr lang="en-US" sz="2200" dirty="0">
+                <a:solidFill>
+                  <a:srgbClr val="111111"/>
+                </a:solidFill>
+                <a:latin typeface="Lato" pitchFamily="34" charset="0"/>
+                <a:ea typeface="Lato" pitchFamily="34" charset="-122"/>
+                <a:cs typeface="Lato" pitchFamily="34" charset="-120"/>
+              </a:rPr>
               <a:t>Save it as DA19. Write two sentences: what you changed and how you checked it.</a:t>
             </a:r>
-            <a:endParaRPr lang="en-US" sz="2700" dirty="0"/>
+            <a:endParaRPr lang="en-US" sz="2200" dirty="0"/>
           </a:p>
         </p:txBody>
       </p:sp>
@@ -7651,9 +7737,33 @@
           </a:ln>
         </p:spPr>
       </p:sp>
-      <p:sp>
-        <p:nvSpPr>
-          <p:cNvPr id="13" name="Text 9"/>
+      <p:pic>
+        <p:nvPicPr>
+          <p:cNvPr id="13" name="Image 2" descr="disclosure">    </p:cNvPr>
+          <p:cNvPicPr>
+            <a:picLocks noChangeAspect="1"/>
+          </p:cNvPicPr>
+          <p:nvPr/>
+        </p:nvPicPr>
+        <p:blipFill>
+          <a:blip r:embed="rId3"/>
+          <a:stretch>
+            <a:fillRect/>
+          </a:stretch>
+        </p:blipFill>
+        <p:spPr>
+          <a:xfrm>
+            <a:off x="640080" y="4745736"/>
+            <a:ext cx="1188720" cy="1188720"/>
+          </a:xfrm>
+          <a:prstGeom prst="rect">
+            <a:avLst/>
+          </a:prstGeom>
+        </p:spPr>
+      </p:pic>
+      <p:sp>
+        <p:nvSpPr>
+          <p:cNvPr id="14" name="Text 9"/>
           <p:cNvSpPr txBox="1"/>
           <p:nvPr/>
         </p:nvSpPr>
@@ -7695,7 +7805,7 @@
       </p:sp>
       <p:sp>
         <p:nvSpPr>
-          <p:cNvPr id="14" name="Text 10"/>
+          <p:cNvPr id="15" name="Text 10"/>
           <p:cNvSpPr txBox="1"/>
           <p:nvPr/>
         </p:nvSpPr>
@@ -7737,7 +7847,7 @@
       </p:sp>
       <p:sp>
         <p:nvSpPr>
-          <p:cNvPr id="15" name="Text 11"/>
+          <p:cNvPr id="16" name="Text 11"/>
           <p:cNvSpPr txBox="1"/>
           <p:nvPr/>
         </p:nvSpPr>
